--- a/GroundTruth/QuarterTwoGroundTruthB.pptx
+++ b/GroundTruth/QuarterTwoGroundTruthB.pptx
@@ -261,13 +261,13 @@
               <c:strCache>
                 <c:ptCount val="3"/>
                 <c:pt idx="0">
-                  <c:v>Q2 2020 Actual </c:v>
+                  <c:v>Second Quarter 2020 Actual </c:v>
                 </c:pt>
                 <c:pt idx="1">
-                  <c:v>Q2 2019 Actual</c:v>
+                  <c:v>Second Quarter 2019 Actual</c:v>
                 </c:pt>
                 <c:pt idx="2">
-                  <c:v>Q2 2020 Budget</c:v>
+                  <c:v>Second Quarter 2020 Budget</c:v>
                 </c:pt>
               </c:strCache>
             </c:strRef>
@@ -383,13 +383,13 @@
               <c:strCache>
                 <c:ptCount val="3"/>
                 <c:pt idx="0">
-                  <c:v>Q2 2020 Actual </c:v>
+                  <c:v>Second Quarter 2020 Actual </c:v>
                 </c:pt>
                 <c:pt idx="1">
-                  <c:v>Q2 2019 Actual</c:v>
+                  <c:v>Second Quarter 2019 Actual</c:v>
                 </c:pt>
                 <c:pt idx="2">
-                  <c:v>Q2 2020 Budget</c:v>
+                  <c:v>Second Quarter 2020 Budget</c:v>
                 </c:pt>
               </c:strCache>
             </c:strRef>
@@ -541,13 +541,13 @@
               <c:strCache>
                 <c:ptCount val="3"/>
                 <c:pt idx="0">
-                  <c:v>Q2 2020 Actual </c:v>
+                  <c:v>Second Quarter 2020 Actual </c:v>
                 </c:pt>
                 <c:pt idx="1">
-                  <c:v>Q2 2019 Actual</c:v>
+                  <c:v>Second Quarter 2019 Actual</c:v>
                 </c:pt>
                 <c:pt idx="2">
-                  <c:v>Q2 2020 Budget</c:v>
+                  <c:v>Second Quarter 2020 Budget</c:v>
                 </c:pt>
               </c:strCache>
             </c:strRef>
@@ -663,13 +663,13 @@
               <c:strCache>
                 <c:ptCount val="3"/>
                 <c:pt idx="0">
-                  <c:v>Q2 2020 Actual </c:v>
+                  <c:v>Second Quarter 2020 Actual </c:v>
                 </c:pt>
                 <c:pt idx="1">
-                  <c:v>Q2 2019 Actual</c:v>
+                  <c:v>Second Quarter 2019 Actual</c:v>
                 </c:pt>
                 <c:pt idx="2">
-                  <c:v>Q2 2020 Budget</c:v>
+                  <c:v>Second Quarter 2020 Budget</c:v>
                 </c:pt>
               </c:strCache>
             </c:strRef>
@@ -829,13 +829,13 @@
               <c:strCache>
                 <c:ptCount val="3"/>
                 <c:pt idx="0">
-                  <c:v>Q2 2020 Actual </c:v>
+                  <c:v>Second Quarter 2020 Actual </c:v>
                 </c:pt>
                 <c:pt idx="1">
-                  <c:v>Q2 2019 Actual</c:v>
+                  <c:v>Second Quarter 2019 Actual</c:v>
                 </c:pt>
                 <c:pt idx="2">
-                  <c:v>Q2 2020 Budget</c:v>
+                  <c:v>Second Quarter 2020 Budget</c:v>
                 </c:pt>
               </c:strCache>
             </c:strRef>
@@ -1220,7 +1220,7 @@
               <c:strCache>
                 <c:ptCount val="1"/>
                 <c:pt idx="0">
-                  <c:v>Q2 YOY Var</c:v>
+                  <c:v>Second Quarter YOY Var</c:v>
                 </c:pt>
               </c:strCache>
             </c:strRef>
@@ -1451,9 +1451,9 @@
         <c:manualLayout>
           <c:xMode val="edge"/>
           <c:yMode val="edge"/>
-          <c:x val="0.34085709785947688"/>
+          <c:x val="0.05"/>
           <c:y val="0.7898015474401654"/>
-          <c:w val="0.31389453095354131"/>
+          <c:w val="0.9"/>
           <c:h val="0.21019845255983463"/>
         </c:manualLayout>
       </c:layout>
@@ -3892,7 +3892,7 @@
               <c:strCache>
                 <c:ptCount val="1"/>
                 <c:pt idx="0">
-                  <c:v>Q2 YOY Var</c:v>
+                  <c:v>Second Quarter YOY Var</c:v>
                 </c:pt>
               </c:strCache>
             </c:strRef>
@@ -4707,7 +4707,7 @@
               <c:strCache>
                 <c:ptCount val="1"/>
                 <c:pt idx="0">
-                  <c:v>Q2 YOY Var</c:v>
+                  <c:v>Second Quarter YOY Var</c:v>
                 </c:pt>
               </c:strCache>
             </c:strRef>
@@ -4907,9 +4907,9 @@
         <c:manualLayout>
           <c:xMode val="edge"/>
           <c:yMode val="edge"/>
-          <c:x val="0.32632870924076274"/>
+          <c:x val="0.05"/>
           <c:y val="0.77630519649039498"/>
-          <c:w val="0.34734258151847458"/>
+          <c:w val="0.9"/>
           <c:h val="0.22369480350960502"/>
         </c:manualLayout>
       </c:layout>
@@ -5161,7 +5161,7 @@
               <c:strCache>
                 <c:ptCount val="1"/>
                 <c:pt idx="0">
-                  <c:v>Q2 YOY Var</c:v>
+                  <c:v>Second Quarter YOY Var</c:v>
                 </c:pt>
               </c:strCache>
             </c:strRef>
@@ -5361,9 +5361,9 @@
         <c:manualLayout>
           <c:xMode val="edge"/>
           <c:yMode val="edge"/>
-          <c:x val="0.32510234677096495"/>
+          <c:x val="0.05"/>
           <c:y val="0.78396702323944412"/>
-          <c:w val="0.35475785241471558"/>
+          <c:w val="0.9"/>
           <c:h val="0.21603297676055586"/>
         </c:manualLayout>
       </c:layout>
@@ -5897,7 +5897,7 @@
               <c:strCache>
                 <c:ptCount val="1"/>
                 <c:pt idx="0">
-                  <c:v>Q2 YOY Var</c:v>
+                  <c:v>Second Quarter YOY Var</c:v>
                 </c:pt>
               </c:strCache>
             </c:strRef>
@@ -6097,9 +6097,9 @@
         <c:manualLayout>
           <c:xMode val="edge"/>
           <c:yMode val="edge"/>
-          <c:x val="0.3358437002748445"/>
+          <c:x val="0.05"/>
           <c:y val="0.75100720747606475"/>
-          <c:w val="0.32831259945031099"/>
+          <c:w val="0.9"/>
           <c:h val="0.23430254280125712"/>
         </c:manualLayout>
       </c:layout>
@@ -21438,7 +21438,9 @@
           </a:prstGeom>
         </p:spPr>
         <p:txBody>
-          <a:bodyPr/>
+          <a:bodyPr>
+            <a:normAutofit fontScale="70000" lnSpcReduction="10000"/>
+          </a:bodyPr>
           <a:lstStyle>
             <a:lvl1pPr algn="l" defTabSz="914400" rtl="0" eaLnBrk="1" latinLnBrk="0" hangingPunct="1">
               <a:lnSpc>
@@ -21465,6 +21467,14 @@
               </a:spcBef>
             </a:pPr>
             <a:r>
+              <a:rPr lang="en-US" sz="4500" dirty="0">
+                <a:solidFill>
+                  <a:srgbClr val="022DB7"/>
+                </a:solidFill>
+                <a:latin typeface="Arial Black" panose="020B0A04020102020204" pitchFamily="34" charset="0"/>
+                <a:ea typeface="+mn-ea"/>
+                <a:cs typeface="+mn-cs"/>
+              </a:rPr>
               <a:t>Second Quarter (Second Quarter) NOI</a:t>
             </a:r>
             <a:endParaRPr lang="en-US" sz="4500" dirty="0">
@@ -25635,7 +25645,7 @@
                 <a:latin typeface="Arial" panose="020B0604020202020204" pitchFamily="34" charset="0"/>
                 <a:cs typeface="Arial" panose="020B0604020202020204" pitchFamily="34" charset="0"/>
               </a:rPr>
-              <a:t>$(525)M YOY decrease through June, driven by a $(553)M YOY Q2 decrease attributable to COVID-19 related reductions.</a:t>
+              <a:t>$(525)M YOY decrease through June, driven by a $(553)M YOY second quarter decrease attributable to COVID-19 related reductions.</a:t>
             </a:r>
           </a:p>
         </p:txBody>
@@ -26142,8 +26152,8 @@
         </p:nvSpPr>
         <p:spPr>
           <a:xfrm>
-            <a:off x="2181948" y="5595464"/>
-            <a:ext cx="5959365" cy="307777"/>
+            <a:off x="681070" y="5595464"/>
+            <a:ext cx="8961120" cy="307777"/>
           </a:xfrm>
           <a:prstGeom prst="rect">
             <a:avLst/>
@@ -26157,7 +26167,8 @@
           <a:lstStyle/>
           <a:p>
             <a:r>
-              <a:t>Second Quarter 2020 A		         Second Quarter 2019 A	                   Second Quarter 2020 B</a:t>
+              <a:rPr lang="en-US" sz="1400" b="0" dirty="0"/>
+              <a:t>Second Quarter 2020 A             Second Quarter 2019 A             Second Quarter 2020 B</a:t>
             </a:r>
           </a:p>
         </p:txBody>
@@ -28060,8 +28071,8 @@
         </p:nvSpPr>
         <p:spPr>
           <a:xfrm>
-            <a:off x="737782" y="1090824"/>
-            <a:ext cx="7762489" cy="609398"/>
+            <a:off x="737782" y="1118524"/>
+            <a:ext cx="7762489" cy="553998"/>
           </a:xfrm>
           <a:prstGeom prst="rect">
             <a:avLst/>
@@ -28092,7 +28103,17 @@
             </a:lvl1pPr>
           </a:lstStyle>
           <a:p>
-            <a:endParaRPr dirty="0"/>
+            <a:r>
+              <a:rPr lang="en-US" sz="2000" b="0" dirty="0">
+                <a:solidFill>
+                  <a:srgbClr val="012DB8"/>
+                </a:solidFill>
+                <a:latin typeface="Arial" panose="020B0604020202020204" pitchFamily="34" charset="0"/>
+                <a:ea typeface="+mn-ea"/>
+                <a:cs typeface="Arial" panose="020B0604020202020204" pitchFamily="34" charset="0"/>
+              </a:rPr>
+              <a:t>$(14)M YOY decrease through June, driven by a $(35)M decrease in second quarter as a result of COVID-19 expense reductions.</a:t>
+            </a:r>
           </a:p>
         </p:txBody>
       </p:sp>
@@ -28951,68 +28972,6 @@
       </p:sp>
       <p:sp>
         <p:nvSpPr>
-          <p:cNvPr id="3" name="Title 1">
-            <a:extLst>
-              <a:ext uri="{FF2B5EF4-FFF2-40B4-BE49-F238E27FC236}">
-                <a16:creationId xmlns:a16="http://schemas.microsoft.com/office/drawing/2014/main" id="{FF8D1AE1-FAA3-CDBE-6BDC-AB58B6586687}"/>
-              </a:ext>
-            </a:extLst>
-          </p:cNvPr>
-          <p:cNvSpPr txBox="1">
-            <a:spLocks/>
-          </p:cNvSpPr>
-          <p:nvPr/>
-        </p:nvSpPr>
-        <p:spPr>
-          <a:xfrm>
-            <a:off x="737782" y="1055464"/>
-            <a:ext cx="7762489" cy="553998"/>
-          </a:xfrm>
-          <a:prstGeom prst="rect">
-            <a:avLst/>
-          </a:prstGeom>
-          <a:noFill/>
-        </p:spPr>
-        <p:txBody>
-          <a:bodyPr vert="horz" wrap="square" lIns="0" tIns="0" rIns="0" bIns="0" rtlCol="0" anchor="ctr">
-            <a:spAutoFit/>
-          </a:bodyPr>
-          <a:lstStyle>
-            <a:lvl1pPr algn="l" defTabSz="914400" rtl="0" eaLnBrk="1" latinLnBrk="0" hangingPunct="1">
-              <a:lnSpc>
-                <a:spcPct val="90000"/>
-              </a:lnSpc>
-              <a:spcBef>
-                <a:spcPct val="0"/>
-              </a:spcBef>
-              <a:buNone/>
-              <a:defRPr sz="4400" b="1" kern="1200">
-                <a:solidFill>
-                  <a:schemeClr val="accent1"/>
-                </a:solidFill>
-                <a:latin typeface="+mj-lt"/>
-                <a:ea typeface="+mj-ea"/>
-                <a:cs typeface="+mj-cs"/>
-              </a:defRPr>
-            </a:lvl1pPr>
-          </a:lstStyle>
-          <a:p>
-            <a:r>
-              <a:rPr lang="en-US" sz="2000" b="0" dirty="0">
-                <a:solidFill>
-                  <a:srgbClr val="012DB8"/>
-                </a:solidFill>
-                <a:latin typeface="Arial" panose="020B0604020202020204" pitchFamily="34" charset="0"/>
-                <a:ea typeface="+mn-ea"/>
-                <a:cs typeface="Arial" panose="020B0604020202020204" pitchFamily="34" charset="0"/>
-              </a:rPr>
-              <a:t>$(14)M YOY decrease through June, driven by a $(35)M decrease in second quarter as a result of COVID-19 expense reductions.</a:t>
-            </a:r>
-          </a:p>
-        </p:txBody>
-      </p:sp>
-      <p:sp>
-        <p:nvSpPr>
           <p:cNvPr id="6" name="TextBox 5">
             <a:extLst>
               <a:ext uri="{FF2B5EF4-FFF2-40B4-BE49-F238E27FC236}">
@@ -29040,11 +28999,11 @@
           <a:lstStyle/>
           <a:p>
             <a:r>
-              <a:rPr lang="en-US" sz="1400" b="1" dirty="0">
+              <a:rPr lang="en-US" sz="1400" b="0" dirty="0">
                 <a:latin typeface="Arial" panose="020B0604020202020204" pitchFamily="34" charset="0"/>
                 <a:cs typeface="Arial" panose="020B0604020202020204" pitchFamily="34" charset="0"/>
               </a:rPr>
-              <a:t>   Second Quarter 2020 A         Second Quarter 2019         Second Quarter 2020 B</a:t>
+              <a:t>   Second Quarter 2020 A         Second Quarter 2019 A         Second Quarter 2020 B</a:t>
             </a:r>
           </a:p>
         </p:txBody>
